--- a/folien/dist/03-routing-vlan-sicherheit.pptx
+++ b/folien/dist/03-routing-vlan-sicherheit.pptx
@@ -10850,7 +10850,7 @@
                 <a:ea typeface="Arial" pitchFamily="34" charset="-122"/>
                 <a:cs typeface="Arial" pitchFamily="34" charset="-120"/>
               </a:rPr>
-              <a:t>Die Schichten als Suchraster: von unten nach oben, jeder Befehl beweist seine Schicht. Heute habt ihr fünf echte Fälle damit gelöst.</a:t>
+              <a:t>Die Schichten als Suchraster: von unten nach oben, jeder Befehl beweist seine Schicht. Heute habt ihr fünf echte Fälle so gelöst.</a:t>
             </a:r>
             <a:endParaRPr lang="en-US" sz="1100" dirty="0"/>
           </a:p>
